--- a/decks/englit-romeo/englit-romeo_ch2_conflict-fathers-daughters.pptx
+++ b/decks/englit-romeo/englit-romeo_ch2_conflict-fathers-daughters.pptx
@@ -124,37 +124,37 @@
   <p:extLst>
     <p:ext uri="{521415D9-36F7-43E2-AB2F-B90AF26B5E84}">
       <p14:sectionLst xmlns:p14="http://schemas.microsoft.com/office/powerpoint/2010/main">
-        <p14:section name="Opening" id="{c4bcc8c3-206d-a160-c01f-b2674e1dce16}">
+        <p14:section name="Opening" id="{f2dd9c1e-0f2d-df83-d0a2-8bc5bb24b521}">
           <p14:sldIdLst>
             <p14:sldId id="256"/>
           </p14:sldIdLst>
         </p14:section>
-        <p14:section name="Gate" id="{00997731-ff7e-0d75-f14b-bc57c1216b5b}">
+        <p14:section name="Gate" id="{421c0815-4b8a-a185-afca-b4a7df6c523e}">
           <p14:sldIdLst>
             <p14:sldId id="257"/>
             <p14:sldId id="258"/>
           </p14:sldIdLst>
         </p14:section>
-        <p14:section name="Pre-teach" id="{49c86564-3308-c53f-426a-89fcc305aa45}">
+        <p14:section name="Pre-teach" id="{6198ab08-1bef-5b02-51fb-3beca20cd0b8}">
           <p14:sldIdLst>
             <p14:sldId id="259"/>
             <p14:sldId id="260"/>
           </p14:sldIdLst>
         </p14:section>
-        <p14:section name="Read-along" id="{bde74049-d119-559f-5156-48834e607566}">
+        <p14:section name="Read-along" id="{abb2301c-6051-f93c-da56-b1614b5356ba}">
           <p14:sldIdLst>
             <p14:sldId id="261"/>
             <p14:sldId id="262"/>
           </p14:sldIdLst>
         </p14:section>
-        <p14:section name="Teach" id="{87afb257-64e9-b064-c609-e2f29769bb15}">
+        <p14:section name="Teach" id="{027a5e9e-7165-e219-0f7d-775f6a2433b6}">
           <p14:sldIdLst>
             <p14:sldId id="263"/>
             <p14:sldId id="264"/>
             <p14:sldId id="265"/>
           </p14:sldIdLst>
         </p14:section>
-        <p14:section name="Routes" id="{2c85e6ce-5d06-b909-d699-8c70725089b5}">
+        <p14:section name="Routes" id="{dcf280b7-08ba-14c7-7e40-e969654f1d5c}">
           <p14:sldIdLst>
             <p14:sldId id="266"/>
             <p14:sldId id="267"/>
@@ -162,12 +162,12 @@
             <p14:sldId id="269"/>
           </p14:sldIdLst>
         </p14:section>
-        <p14:section name="Close" id="{65abbf21-8953-70ec-1cd4-f4e0cdc29662}">
+        <p14:section name="Close" id="{f8a8f9a9-a44b-93d9-643c-1a27da806d14}">
           <p14:sldIdLst>
             <p14:sldId id="270"/>
           </p14:sldIdLst>
         </p14:section>
-        <p14:section name="Answers" id="{9897f7f7-19b8-25e1-a9fd-1e147d088139}">
+        <p14:section name="Answers" id="{216cb49a-6d66-9d71-4527-5cf5f92d520d}">
           <p14:sldIdLst>
             <p14:sldId id="271"/>
             <p14:sldId id="272"/>
@@ -1139,7 +1139,7 @@
               <a:rPr lang="en-US" dirty="0"/>
               <a:t>Exit ticket — individual, silent, on a slip or mini-whiteboard. Recall before help: no notes, no lanes, no hints. Collect before pupils leave.
 Question: In Act 1 Scene 1, what does the Prince threaten to do to anyone who disturbs the peace of Verona again?
-Answer: B   Put them to death. The Prince says the next person to fight in the streets will pay with their life. This is why Romeo's killing of Tybalt is so dangerous in Act 3.
+Answer: D   Put them to death. The Prince says the next person to fight in the streets will pay with their life. This is why Romeo's killing of Tybalt is so dangerous in Act 3.
 Source of this question: gate item 1 re-asked (options rotated) — this chapter has no third quick-check module.
 The ebook also holds task 3, "How Juliet is introduced in Act 1 Scene 3", for homework or the next lesson's do now.
 Sort the slips: correct → ready to move on; incorrect → start next lesson in the pre-teach group, with the read-along and the Support lane. Same destination next time.</a:t>
@@ -1231,7 +1231,7 @@
             <a:r>
               <a:rPr lang="en-US" dirty="0"/>
               <a:t>Answers — task 1: Spotting hegemonic masculinity. Reveal the answer; pupils mark their own work in a different colour, then read the "why" together. Same destination for every lane, so one answer serves the whole class.
-Answer: B   Tybalt says he hates the word peace as he hates hell
+Answer: D   Tybalt says he hates the word peace as he hates hell
 Why: Tybalt's hatred of the very word peace is the clearest statement of Verona's code: a real man fights, and a man who talks of peace is a coward. Everything Romeo does in Act 3 is judged against this code.
 Ask a Support pupil to explain one step, and a Stretch pupil to share their extension.</a:t>
             </a:r>
@@ -1413,7 +1413,7 @@
             <a:r>
               <a:rPr lang="en-US" dirty="0"/>
               <a:t>Answers — exit ticket: Exit ticket. Reveal the answer; pupils mark their own work in a different colour, then read the "why" together. Same destination for every lane, so one answer serves the whole class.
-Answer: B   Put them to death
+Answer: D   Put them to death
 Why: The Prince says the next person to fight in the streets will pay with their life. This is why Romeo's killing of Tybalt is so dangerous in Act 3.
 Ask a Support pupil to explain one step, and a Stretch pupil to share their extension.</a:t>
             </a:r>
@@ -1504,8 +1504,8 @@
             <a:r>
               <a:rPr lang="en-US" dirty="0"/>
               <a:t>Do now — retrieval. Silent, no notes, no help: recall comes before any support. Give about four minutes.
-1. In Act 1 Scene 1, what does the Prince threaten to do to anyone who disturbs the peace of Verona again?  →  C   Put them to death
-2. In Act 1 Scene 2, what does Lord Capulet tell Paris about marrying Juliet?  →  A   Juliet is too young; she must wait and must agree herself
+1. In Act 1 Scene 1, what does the Prince threaten to do to anyone who disturbs the peace of Verona again?  →  A   Put them to death
+2. In Act 1 Scene 2, what does Lord Capulet tell Paris about marrying Juliet?  →  B   Juliet is too young; she must wait and must agree herself
 3. Juliet's first line, ‘What is your will?’, is a question. The term for a sentence that asks a question is an ___ sentence.  →  interrogative
 Circulate: who gets 3/3 (Stretch route), 2/3 (Core), 0–1 (Support)? Use this to route pupils later in the lesson.</a:t>
             </a:r>
@@ -1596,8 +1596,8 @@
             <a:r>
               <a:rPr lang="en-US" dirty="0"/>
               <a:t>Answers — pupils mark their own in a different colour, then hands up for 3/3, 2/3, 1/3.
-1. C   Put them to death. The Prince says the next person to fight in the streets will pay with their life. This is why Romeo's killing of Tybalt is so dangerous in Act 3.
-2. A   Juliet is too young; she must wait and must agree herself. Capulet says Juliet has not seen fourteen years, asks Paris to wait two summers, and says his own will is only a part: she must consent.
+1. A   Put them to death. The Prince says the next person to fight in the streets will pay with their life. This is why Romeo's killing of Tybalt is so dangerous in Act 3.
+2. B   Juliet is too young; she must wait and must agree herself. Capulet says Juliet has not seen fourteen years, asks Paris to wait two summers, and says his own will is only a part: she must consent.
 3. interrogative. Interrogative sentences ask questions. Here the question shows Juliet putting her mother's wishes before her own.
 Say the route each score points to: 3/3 Stretch, 2/3 Core, 0–1 Support. Pupils may choose to move up.</a:t>
             </a:r>
@@ -4778,7 +4778,7 @@
                 <a:ea typeface="Calibri" pitchFamily="34" charset="-122"/>
                 <a:cs typeface="Calibri" pitchFamily="34" charset="-120"/>
               </a:rPr>
-              <a:t>Tybalt says he hates the word peace as he hates hell</a:t>
+              <a:t>The Prince orders both families to his palace</a:t>
             </a:r>
             <a:endParaRPr lang="en-US" sz="2600" dirty="0"/>
           </a:p>
@@ -4852,7 +4852,7 @@
                 <a:ea typeface="Calibri" pitchFamily="34" charset="-122"/>
                 <a:cs typeface="Calibri" pitchFamily="34" charset="-120"/>
               </a:rPr>
-              <a:t>The Prince orders both families to his palace</a:t>
+              <a:t>Tybalt says he hates the word peace as he hates hell</a:t>
             </a:r>
             <a:endParaRPr lang="en-US" sz="2600" dirty="0"/>
           </a:p>
@@ -8505,7 +8505,7 @@
                 <a:ea typeface="Calibri" pitchFamily="34" charset="-122"/>
                 <a:cs typeface="Calibri" pitchFamily="34" charset="-120"/>
               </a:rPr>
-              <a:t>Banish them</a:t>
+              <a:t>Fine them</a:t>
             </a:r>
             <a:endParaRPr lang="en-US" sz="2400" dirty="0"/>
           </a:p>
@@ -8542,7 +8542,7 @@
                 <a:ea typeface="Calibri" pitchFamily="34" charset="-122"/>
                 <a:cs typeface="Calibri" pitchFamily="34" charset="-120"/>
               </a:rPr>
-              <a:t>Put them to death</a:t>
+              <a:t>Imprison them</a:t>
             </a:r>
             <a:endParaRPr lang="en-US" sz="2400" dirty="0"/>
           </a:p>
@@ -8579,7 +8579,7 @@
                 <a:ea typeface="Calibri" pitchFamily="34" charset="-122"/>
                 <a:cs typeface="Calibri" pitchFamily="34" charset="-120"/>
               </a:rPr>
-              <a:t>Imprison them</a:t>
+              <a:t>Banish them</a:t>
             </a:r>
             <a:endParaRPr lang="en-US" sz="2400" dirty="0"/>
           </a:p>
@@ -8616,7 +8616,7 @@
                 <a:ea typeface="Calibri" pitchFamily="34" charset="-122"/>
                 <a:cs typeface="Calibri" pitchFamily="34" charset="-120"/>
               </a:rPr>
-              <a:t>Fine them</a:t>
+              <a:t>Put them to death</a:t>
             </a:r>
             <a:endParaRPr lang="en-US" sz="2400" dirty="0"/>
           </a:p>
@@ -9021,7 +9021,7 @@
                 <a:ea typeface="Cambria" pitchFamily="34" charset="-122"/>
                 <a:cs typeface="Cambria" pitchFamily="34" charset="-120"/>
               </a:rPr>
-              <a:t>B   Tybalt says he hates the word peace as he hates hell</a:t>
+              <a:t>D   Tybalt says he hates the word peace as he hates hell</a:t>
             </a:r>
             <a:endParaRPr lang="en-US" sz="1800" dirty="0"/>
           </a:p>
@@ -10050,7 +10050,7 @@
                 <a:ea typeface="Cambria" pitchFamily="34" charset="-122"/>
                 <a:cs typeface="Cambria" pitchFamily="34" charset="-120"/>
               </a:rPr>
-              <a:t>B   Put them to death</a:t>
+              <a:t>D   Put them to death</a:t>
             </a:r>
             <a:endParaRPr lang="en-US" sz="1800" dirty="0"/>
           </a:p>
@@ -10584,7 +10584,7 @@
                 <a:ea typeface="Calibri" pitchFamily="34" charset="-122"/>
                 <a:cs typeface="Calibri" pitchFamily="34" charset="-120"/>
               </a:rPr>
-              <a:t>Fine them</a:t>
+              <a:t>Put them to death</a:t>
             </a:r>
             <a:endParaRPr lang="en-US" sz="2200" dirty="0"/>
           </a:p>
@@ -10621,7 +10621,7 @@
                 <a:ea typeface="Calibri" pitchFamily="34" charset="-122"/>
                 <a:cs typeface="Calibri" pitchFamily="34" charset="-120"/>
               </a:rPr>
-              <a:t>Banish them</a:t>
+              <a:t>Fine them</a:t>
             </a:r>
             <a:endParaRPr lang="en-US" sz="2200" dirty="0"/>
           </a:p>
@@ -10658,7 +10658,7 @@
                 <a:ea typeface="Calibri" pitchFamily="34" charset="-122"/>
                 <a:cs typeface="Calibri" pitchFamily="34" charset="-120"/>
               </a:rPr>
-              <a:t>Put them to death</a:t>
+              <a:t>Imprison them</a:t>
             </a:r>
             <a:endParaRPr lang="en-US" sz="2200" dirty="0"/>
           </a:p>
@@ -10695,7 +10695,7 @@
                 <a:ea typeface="Calibri" pitchFamily="34" charset="-122"/>
                 <a:cs typeface="Calibri" pitchFamily="34" charset="-120"/>
               </a:rPr>
-              <a:t>Imprison them</a:t>
+              <a:t>Banish them</a:t>
             </a:r>
             <a:endParaRPr lang="en-US" sz="2200" dirty="0"/>
           </a:p>
@@ -10899,7 +10899,7 @@
                 <a:ea typeface="Calibri" pitchFamily="34" charset="-122"/>
                 <a:cs typeface="Calibri" pitchFamily="34" charset="-120"/>
               </a:rPr>
-              <a:t>Juliet is too young; she must wait and must agree herself</a:t>
+              <a:t>Paris may marry her on Thursday</a:t>
             </a:r>
             <a:endParaRPr lang="en-US" sz="1800" dirty="0"/>
           </a:p>
@@ -10936,7 +10936,7 @@
                 <a:ea typeface="Calibri" pitchFamily="34" charset="-122"/>
                 <a:cs typeface="Calibri" pitchFamily="34" charset="-120"/>
               </a:rPr>
-              <a:t>Paris may marry her on Thursday</a:t>
+              <a:t>Juliet is too young; she must wait and must agree herself</a:t>
             </a:r>
             <a:endParaRPr lang="en-US" sz="1800" dirty="0"/>
           </a:p>
@@ -11609,7 +11609,7 @@
                 <a:ea typeface="Calibri" pitchFamily="34" charset="-122"/>
                 <a:cs typeface="Calibri" pitchFamily="34" charset="-120"/>
               </a:rPr>
-              <a:t>C   Put them to death</a:t>
+              <a:t>A   Put them to death</a:t>
             </a:r>
             <a:endParaRPr lang="en-US" sz="2200" dirty="0"/>
           </a:p>
@@ -11859,7 +11859,7 @@
                 <a:ea typeface="Calibri" pitchFamily="34" charset="-122"/>
                 <a:cs typeface="Calibri" pitchFamily="34" charset="-120"/>
               </a:rPr>
-              <a:t>A   Juliet is too young; she must wait and must agree herself</a:t>
+              <a:t>B   Juliet is too young; she must wait and must agree herself</a:t>
             </a:r>
             <a:endParaRPr lang="en-US" sz="2200" dirty="0"/>
           </a:p>

--- a/decks/englit-romeo/englit-romeo_ch2_conflict-fathers-daughters.pptx
+++ b/decks/englit-romeo/englit-romeo_ch2_conflict-fathers-daughters.pptx
@@ -124,37 +124,37 @@
   <p:extLst>
     <p:ext uri="{521415D9-36F7-43E2-AB2F-B90AF26B5E84}">
       <p14:sectionLst xmlns:p14="http://schemas.microsoft.com/office/powerpoint/2010/main">
-        <p14:section name="Opening" id="{f2dd9c1e-0f2d-df83-d0a2-8bc5bb24b521}">
+        <p14:section name="Opening" id="{02b7fc29-e9e5-c884-911f-d28357034400}">
           <p14:sldIdLst>
             <p14:sldId id="256"/>
           </p14:sldIdLst>
         </p14:section>
-        <p14:section name="Gate" id="{421c0815-4b8a-a185-afca-b4a7df6c523e}">
+        <p14:section name="Gate" id="{9ed47916-2469-f4c1-5a43-775f2470939a}">
           <p14:sldIdLst>
             <p14:sldId id="257"/>
             <p14:sldId id="258"/>
           </p14:sldIdLst>
         </p14:section>
-        <p14:section name="Pre-teach" id="{6198ab08-1bef-5b02-51fb-3beca20cd0b8}">
+        <p14:section name="Pre-teach" id="{8212409a-f063-9dfe-7540-c04ff1f80499}">
           <p14:sldIdLst>
             <p14:sldId id="259"/>
             <p14:sldId id="260"/>
           </p14:sldIdLst>
         </p14:section>
-        <p14:section name="Read-along" id="{abb2301c-6051-f93c-da56-b1614b5356ba}">
+        <p14:section name="Read-along" id="{96fc19fb-14df-9596-2e21-e7f253774964}">
           <p14:sldIdLst>
             <p14:sldId id="261"/>
             <p14:sldId id="262"/>
           </p14:sldIdLst>
         </p14:section>
-        <p14:section name="Teach" id="{027a5e9e-7165-e219-0f7d-775f6a2433b6}">
+        <p14:section name="Teach" id="{c403d6c7-aaec-26f0-8cb8-fab5d0cc0d39}">
           <p14:sldIdLst>
             <p14:sldId id="263"/>
             <p14:sldId id="264"/>
             <p14:sldId id="265"/>
           </p14:sldIdLst>
         </p14:section>
-        <p14:section name="Routes" id="{dcf280b7-08ba-14c7-7e40-e969654f1d5c}">
+        <p14:section name="Routes" id="{7359c504-8d6d-2f18-368f-e5ae30466237}">
           <p14:sldIdLst>
             <p14:sldId id="266"/>
             <p14:sldId id="267"/>
@@ -162,12 +162,12 @@
             <p14:sldId id="269"/>
           </p14:sldIdLst>
         </p14:section>
-        <p14:section name="Close" id="{f8a8f9a9-a44b-93d9-643c-1a27da806d14}">
+        <p14:section name="Close" id="{6a1102bf-3199-548f-b4e3-b63262727251}">
           <p14:sldIdLst>
             <p14:sldId id="270"/>
           </p14:sldIdLst>
         </p14:section>
-        <p14:section name="Answers" id="{216cb49a-6d66-9d71-4527-5cf5f92d520d}">
+        <p14:section name="Answers" id="{f0bb9084-76d1-6818-0c0a-cdc5bc6bcd52}">
           <p14:sldIdLst>
             <p14:sldId id="271"/>
             <p14:sldId id="272"/>
